--- a/Social Network Web.pptx
+++ b/Social Network Web.pptx
@@ -5396,15 +5396,15 @@
         </p:nvSpPr>
         <p:spPr>
           <a:xfrm>
-            <a:off x="1047750" y="2752725"/>
-            <a:ext cx="14287500" cy="1000274"/>
+            <a:off x="7054421" y="4533900"/>
+            <a:ext cx="4179158" cy="1000274"/>
           </a:xfrm>
           <a:prstGeom prst="rect">
             <a:avLst/>
           </a:prstGeom>
         </p:spPr>
         <p:txBody>
-          <a:bodyPr lIns="0" tIns="0" rIns="0" bIns="0" rtlCol="0" anchor="t">
+          <a:bodyPr wrap="square" lIns="0" tIns="0" rIns="0" bIns="0" rtlCol="0" anchor="t">
             <a:spAutoFit/>
           </a:bodyPr>
           <a:lstStyle/>
